--- a/Project_XX_SHAP_CloudTrail_Drift/Presentation/Capstone_IDP_Progress_Presentation.pptx
+++ b/Project_XX_SHAP_CloudTrail_Drift/Presentation/Capstone_IDP_Progress_Presentation.pptx
@@ -3354,7 +3354,7 @@
                 </a:solidFill>
                 <a:latin typeface="Arial"/>
               </a:rPr>
-              <a:t>Prepared for supervisor progress review | 21 October 2026</a:t>
+              <a:t>Prepared for supervisor progress review | 26 October 2026</a:t>
             </a:r>
           </a:p>
         </p:txBody>
